--- a/crypto_06_wallets.pptx
+++ b/crypto_06_wallets.pptx
@@ -818,7 +818,7 @@
           <a:p>
             <a:fld id="{EB1FAE4C-5332-014D-8E1B-BB8DA73EF81D}" type="datetimeFigureOut">
               <a:rPr lang="en-US"/>
-              <a:t>5/2/22</a:t>
+              <a:t>5/5/22</a:t>
             </a:fld>
             <a:endParaRPr lang="en-US"/>
           </a:p>
@@ -988,7 +988,7 @@
           <a:p>
             <a:fld id="{EB1FAE4C-5332-014D-8E1B-BB8DA73EF81D}" type="datetimeFigureOut">
               <a:rPr lang="en-US"/>
-              <a:t>5/2/22</a:t>
+              <a:t>5/5/22</a:t>
             </a:fld>
             <a:endParaRPr lang="en-US"/>
           </a:p>
@@ -1168,7 +1168,7 @@
           <a:p>
             <a:fld id="{EB1FAE4C-5332-014D-8E1B-BB8DA73EF81D}" type="datetimeFigureOut">
               <a:rPr lang="en-US"/>
-              <a:t>5/2/22</a:t>
+              <a:t>5/5/22</a:t>
             </a:fld>
             <a:endParaRPr lang="en-US"/>
           </a:p>
@@ -1338,7 +1338,7 @@
           <a:p>
             <a:fld id="{EB1FAE4C-5332-014D-8E1B-BB8DA73EF81D}" type="datetimeFigureOut">
               <a:rPr lang="en-US"/>
-              <a:t>5/2/22</a:t>
+              <a:t>5/5/22</a:t>
             </a:fld>
             <a:endParaRPr lang="en-US"/>
           </a:p>
@@ -1585,7 +1585,7 @@
           <a:p>
             <a:fld id="{EB1FAE4C-5332-014D-8E1B-BB8DA73EF81D}" type="datetimeFigureOut">
               <a:rPr lang="en-US"/>
-              <a:t>5/2/22</a:t>
+              <a:t>5/5/22</a:t>
             </a:fld>
             <a:endParaRPr lang="en-US"/>
           </a:p>
@@ -1816,7 +1816,7 @@
           <a:p>
             <a:fld id="{EB1FAE4C-5332-014D-8E1B-BB8DA73EF81D}" type="datetimeFigureOut">
               <a:rPr lang="en-US"/>
-              <a:t>5/2/22</a:t>
+              <a:t>5/5/22</a:t>
             </a:fld>
             <a:endParaRPr lang="en-US"/>
           </a:p>
@@ -2182,7 +2182,7 @@
           <a:p>
             <a:fld id="{EB1FAE4C-5332-014D-8E1B-BB8DA73EF81D}" type="datetimeFigureOut">
               <a:rPr lang="en-US"/>
-              <a:t>5/2/22</a:t>
+              <a:t>5/5/22</a:t>
             </a:fld>
             <a:endParaRPr lang="en-US"/>
           </a:p>
@@ -2301,7 +2301,7 @@
           <a:p>
             <a:fld id="{EB1FAE4C-5332-014D-8E1B-BB8DA73EF81D}" type="datetimeFigureOut">
               <a:rPr lang="en-US"/>
-              <a:t>5/2/22</a:t>
+              <a:t>5/5/22</a:t>
             </a:fld>
             <a:endParaRPr lang="en-US"/>
           </a:p>
@@ -2398,7 +2398,7 @@
           <a:p>
             <a:fld id="{EB1FAE4C-5332-014D-8E1B-BB8DA73EF81D}" type="datetimeFigureOut">
               <a:rPr lang="en-US"/>
-              <a:t>5/2/22</a:t>
+              <a:t>5/5/22</a:t>
             </a:fld>
             <a:endParaRPr lang="en-US"/>
           </a:p>
@@ -2674,7 +2674,7 @@
           <a:p>
             <a:fld id="{EB1FAE4C-5332-014D-8E1B-BB8DA73EF81D}" type="datetimeFigureOut">
               <a:rPr lang="en-US"/>
-              <a:t>5/2/22</a:t>
+              <a:t>5/5/22</a:t>
             </a:fld>
             <a:endParaRPr lang="en-US"/>
           </a:p>
@@ -2931,7 +2931,7 @@
           <a:p>
             <a:fld id="{EB1FAE4C-5332-014D-8E1B-BB8DA73EF81D}" type="datetimeFigureOut">
               <a:rPr lang="en-US"/>
-              <a:t>5/2/22</a:t>
+              <a:t>5/5/22</a:t>
             </a:fld>
             <a:endParaRPr lang="en-US"/>
           </a:p>
@@ -3144,7 +3144,7 @@
           <a:p>
             <a:fld id="{EB1FAE4C-5332-014D-8E1B-BB8DA73EF81D}" type="datetimeFigureOut">
               <a:rPr lang="en-US"/>
-              <a:t>5/2/22</a:t>
+              <a:t>5/5/22</a:t>
             </a:fld>
             <a:endParaRPr lang="en-US"/>
           </a:p>
@@ -6324,6 +6324,46 @@
               <a:rPr lang="en-US"/>
               <a:t>Create new wallet</a:t>
             </a:r>
+          </a:p>
+        </p:txBody>
+      </p:sp>
+      <p:sp>
+        <p:nvSpPr>
+          <p:cNvPr id="5" name="TextBox 4">
+            <a:extLst>
+              <a:ext uri="{FF2B5EF4-FFF2-40B4-BE49-F238E27FC236}">
+                <a16:creationId xmlns:a16="http://schemas.microsoft.com/office/drawing/2014/main" id="{E11FBDA0-9516-A444-F915-1BA0735E51C0}"/>
+              </a:ext>
+            </a:extLst>
+          </p:cNvPr>
+          <p:cNvSpPr txBox="1"/>
+          <p:nvPr/>
+        </p:nvSpPr>
+        <p:spPr>
+          <a:xfrm>
+            <a:off x="6727371" y="443812"/>
+            <a:ext cx="2242458" cy="369332"/>
+          </a:xfrm>
+          <a:prstGeom prst="rect">
+            <a:avLst/>
+          </a:prstGeom>
+          <a:noFill/>
+        </p:spPr>
+        <p:txBody>
+          <a:bodyPr wrap="square" rtlCol="0">
+            <a:spAutoFit/>
+          </a:bodyPr>
+          <a:lstStyle/>
+          <a:p>
+            <a:r>
+              <a:rPr lang="en-US" b="1">
+                <a:solidFill>
+                  <a:srgbClr val="FF0000"/>
+                </a:solidFill>
+              </a:rPr>
+              <a:t>Bitcoin Core Wallet</a:t>
+            </a:r>
+            <a:endParaRPr lang="en-US"/>
           </a:p>
         </p:txBody>
       </p:sp>
